--- a/ppt/IoTAI12-TFLite.pptx
+++ b/ppt/IoTAI12-TFLite.pptx
@@ -3692,36 +3692,12 @@
             <a:pPr eaLnBrk="1" hangingPunct="1"/>
             <a:r>
               <a:rPr lang="fr-FR" altLang="fr-FR" dirty="0" err="1"/>
-              <a:t>TensorFlow</a:t>
+              <a:t>TFlite</a:t>
             </a:r>
             <a:endParaRPr lang="fr-FR" altLang="fr-FR" dirty="0"/>
           </a:p>
         </p:txBody>
       </p:sp>
-      <p:pic>
-        <p:nvPicPr>
-          <p:cNvPr id="2" name="Image 1"/>
-          <p:cNvPicPr>
-            <a:picLocks noChangeAspect="1"/>
-          </p:cNvPicPr>
-          <p:nvPr/>
-        </p:nvPicPr>
-        <p:blipFill>
-          <a:blip r:embed="rId2"/>
-          <a:stretch>
-            <a:fillRect/>
-          </a:stretch>
-        </p:blipFill>
-        <p:spPr>
-          <a:xfrm>
-            <a:off x="1214437" y="5023445"/>
-            <a:ext cx="6715125" cy="1285875"/>
-          </a:xfrm>
-          <a:prstGeom prst="rect">
-            <a:avLst/>
-          </a:prstGeom>
-        </p:spPr>
-      </p:pic>
       <p:sp>
         <p:nvSpPr>
           <p:cNvPr id="3" name="ZoneTexte 2"/>
@@ -3755,6 +3731,66 @@
           </a:p>
         </p:txBody>
       </p:sp>
+      <p:pic>
+        <p:nvPicPr>
+          <p:cNvPr id="5" name="Image 4">
+            <a:extLst>
+              <a:ext uri="{FF2B5EF4-FFF2-40B4-BE49-F238E27FC236}">
+                <a16:creationId xmlns:a16="http://schemas.microsoft.com/office/drawing/2014/main" id="{2C66C27A-8CC1-FE3A-4507-EA34AED1F78D}"/>
+              </a:ext>
+            </a:extLst>
+          </p:cNvPr>
+          <p:cNvPicPr>
+            <a:picLocks noChangeAspect="1"/>
+          </p:cNvPicPr>
+          <p:nvPr/>
+        </p:nvPicPr>
+        <p:blipFill>
+          <a:blip r:embed="rId2"/>
+          <a:stretch>
+            <a:fillRect/>
+          </a:stretch>
+        </p:blipFill>
+        <p:spPr>
+          <a:xfrm>
+            <a:off x="3118381" y="3097894"/>
+            <a:ext cx="3038899" cy="1667108"/>
+          </a:xfrm>
+          <a:prstGeom prst="rect">
+            <a:avLst/>
+          </a:prstGeom>
+        </p:spPr>
+      </p:pic>
+      <p:pic>
+        <p:nvPicPr>
+          <p:cNvPr id="7" name="Image 6">
+            <a:extLst>
+              <a:ext uri="{FF2B5EF4-FFF2-40B4-BE49-F238E27FC236}">
+                <a16:creationId xmlns:a16="http://schemas.microsoft.com/office/drawing/2014/main" id="{24436CAE-6313-4FDB-AA60-FCE210033760}"/>
+              </a:ext>
+            </a:extLst>
+          </p:cNvPr>
+          <p:cNvPicPr>
+            <a:picLocks noChangeAspect="1"/>
+          </p:cNvPicPr>
+          <p:nvPr/>
+        </p:nvPicPr>
+        <p:blipFill>
+          <a:blip r:embed="rId3"/>
+          <a:stretch>
+            <a:fillRect/>
+          </a:stretch>
+        </p:blipFill>
+        <p:spPr>
+          <a:xfrm>
+            <a:off x="3885250" y="4938615"/>
+            <a:ext cx="1505160" cy="1400370"/>
+          </a:xfrm>
+          <a:prstGeom prst="rect">
+            <a:avLst/>
+          </a:prstGeom>
+        </p:spPr>
+      </p:pic>
     </p:spTree>
   </p:cSld>
   <p:clrMapOvr>
